--- a/gbd/GBD_Presentacion.pptx
+++ b/gbd/GBD_Presentacion.pptx
@@ -16614,7 +16614,7 @@
             <a:tbl>
               <a:tblPr bandRow="1" firstRow="1">
                 <a:noFill/>
-                <a:tableStyleId>{3344F165-F4BB-4514-82D4-DE3137348D60}</a:tableStyleId>
+                <a:tableStyleId>{852809B2-827E-4CA0-8BD5-29B0BED1E968}</a:tableStyleId>
               </a:tblPr>
               <a:tblGrid>
                 <a:gridCol w="3529450"/>
@@ -19259,7 +19259,7 @@
             <a:tbl>
               <a:tblPr bandRow="1" firstRow="1">
                 <a:noFill/>
-                <a:tableStyleId>{3344F165-F4BB-4514-82D4-DE3137348D60}</a:tableStyleId>
+                <a:tableStyleId>{852809B2-827E-4CA0-8BD5-29B0BED1E968}</a:tableStyleId>
               </a:tblPr>
               <a:tblGrid>
                 <a:gridCol w="1424125"/>
@@ -24102,7 +24102,7 @@
                 <a:cs typeface="Lato"/>
                 <a:sym typeface="Lato"/>
               </a:rPr>
-              <a:t>Asistencia mínima (8</a:t>
+              <a:t>Asistencia mínima (</a:t>
             </a:r>
             <a:r>
               <a:rPr b="1" lang="en-US" sz="1500">
@@ -24114,7 +24114,7 @@
                 <a:cs typeface="Lato"/>
                 <a:sym typeface="Lato"/>
               </a:rPr>
-              <a:t>5</a:t>
+              <a:t>80</a:t>
             </a:r>
             <a:r>
               <a:rPr b="1" i="0" lang="en-US" sz="1500" u="none" cap="none" strike="noStrike">
